--- a/assets/TCS302/Unit-1/Lecture1_Introduction_to_Data_Structures.pptx
+++ b/assets/TCS302/Unit-1/Lecture1_Introduction_to_Data_Structures.pptx
@@ -5,7 +5,7 @@
     <p:sldMasterId id="2147483648" r:id="rId1"/>
   </p:sldMasterIdLst>
   <p:notesMasterIdLst>
-    <p:notesMasterId r:id="rId18"/>
+    <p:notesMasterId r:id="rId16"/>
   </p:notesMasterIdLst>
   <p:sldIdLst>
     <p:sldId id="256" r:id="rId2"/>
@@ -22,8 +22,6 @@
     <p:sldId id="267" r:id="rId13"/>
     <p:sldId id="268" r:id="rId14"/>
     <p:sldId id="269" r:id="rId15"/>
-    <p:sldId id="270" r:id="rId16"/>
-    <p:sldId id="271" r:id="rId17"/>
   </p:sldIdLst>
   <p:sldSz cx="12192000" cy="6858000"/>
   <p:notesSz cx="6858000" cy="12192000"/>
@@ -895,180 +893,6 @@
 </p:notes>
 </file>
 
-<file path=ppt/notesSlides/notesSlide15.xml><?xml version="1.0" encoding="utf-8"?>
-<p:notes xmlns:a="http://schemas.openxmlformats.org/drawingml/2006/main" xmlns:r="http://schemas.openxmlformats.org/officeDocument/2006/relationships" xmlns:p="http://schemas.openxmlformats.org/presentationml/2006/main">
-  <p:cSld>
-    <p:spTree>
-      <p:nvGrpSpPr>
-        <p:cNvPr id="1" name=""/>
-        <p:cNvGrpSpPr/>
-        <p:nvPr/>
-      </p:nvGrpSpPr>
-      <p:grpSpPr>
-        <a:xfrm>
-          <a:off x="0" y="0"/>
-          <a:ext cx="0" cy="0"/>
-          <a:chOff x="0" y="0"/>
-          <a:chExt cx="0" cy="0"/>
-        </a:xfrm>
-      </p:grpSpPr>
-      <p:sp>
-        <p:nvSpPr>
-          <p:cNvPr id="2" name="Slide Image Placeholder 1"/>
-          <p:cNvSpPr>
-            <a:spLocks noGrp="1" noRot="1" noChangeAspect="1"/>
-          </p:cNvSpPr>
-          <p:nvPr>
-            <p:ph type="sldImg"/>
-          </p:nvPr>
-        </p:nvSpPr>
-        <p:spPr/>
-      </p:sp>
-      <p:sp>
-        <p:nvSpPr>
-          <p:cNvPr id="3" name="Notes Placeholder 2"/>
-          <p:cNvSpPr>
-            <a:spLocks noGrp="1"/>
-          </p:cNvSpPr>
-          <p:nvPr>
-            <p:ph type="body" idx="1"/>
-          </p:nvPr>
-        </p:nvSpPr>
-        <p:spPr/>
-        <p:txBody>
-          <a:bodyPr/>
-          <a:lstStyle/>
-          <a:p>
-            <a:r>
-              <a:rPr lang="en-US" dirty="0"/>
-              <a:t>Let students discuss. Then pick two responses. This checks if students understood fields, records and choosing a structure.</a:t>
-            </a:r>
-          </a:p>
-        </p:txBody>
-      </p:sp>
-      <p:sp>
-        <p:nvSpPr>
-          <p:cNvPr id="4" name="Slide Number Placeholder 3"/>
-          <p:cNvSpPr>
-            <a:spLocks noGrp="1"/>
-          </p:cNvSpPr>
-          <p:nvPr>
-            <p:ph type="sldNum" sz="quarter" idx="10"/>
-          </p:nvPr>
-        </p:nvSpPr>
-        <p:spPr/>
-        <p:txBody>
-          <a:bodyPr/>
-          <a:lstStyle/>
-          <a:p>
-            <a:fld id="{F7021451-1387-4CA6-816F-3879F97B5CBC}" type="slidenum">
-              <a:rPr lang="en-US"/>
-              <a:t>15</a:t>
-            </a:fld>
-            <a:endParaRPr lang="en-US"/>
-          </a:p>
-        </p:txBody>
-      </p:sp>
-    </p:spTree>
-    <p:extLst>
-      <p:ext uri="{BB962C8B-B14F-4D97-AF65-F5344CB8AC3E}">
-        <p14:creationId xmlns:p14="http://schemas.microsoft.com/office/powerpoint/2010/main" val="1024086991"/>
-      </p:ext>
-    </p:extLst>
-  </p:cSld>
-  <p:clrMapOvr>
-    <a:masterClrMapping/>
-  </p:clrMapOvr>
-</p:notes>
-</file>
-
-<file path=ppt/notesSlides/notesSlide16.xml><?xml version="1.0" encoding="utf-8"?>
-<p:notes xmlns:a="http://schemas.openxmlformats.org/drawingml/2006/main" xmlns:r="http://schemas.openxmlformats.org/officeDocument/2006/relationships" xmlns:p="http://schemas.openxmlformats.org/presentationml/2006/main">
-  <p:cSld>
-    <p:spTree>
-      <p:nvGrpSpPr>
-        <p:cNvPr id="1" name=""/>
-        <p:cNvGrpSpPr/>
-        <p:nvPr/>
-      </p:nvGrpSpPr>
-      <p:grpSpPr>
-        <a:xfrm>
-          <a:off x="0" y="0"/>
-          <a:ext cx="0" cy="0"/>
-          <a:chOff x="0" y="0"/>
-          <a:chExt cx="0" cy="0"/>
-        </a:xfrm>
-      </p:grpSpPr>
-      <p:sp>
-        <p:nvSpPr>
-          <p:cNvPr id="2" name="Slide Image Placeholder 1"/>
-          <p:cNvSpPr>
-            <a:spLocks noGrp="1" noRot="1" noChangeAspect="1"/>
-          </p:cNvSpPr>
-          <p:nvPr>
-            <p:ph type="sldImg"/>
-          </p:nvPr>
-        </p:nvSpPr>
-        <p:spPr/>
-      </p:sp>
-      <p:sp>
-        <p:nvSpPr>
-          <p:cNvPr id="3" name="Notes Placeholder 2"/>
-          <p:cNvSpPr>
-            <a:spLocks noGrp="1"/>
-          </p:cNvSpPr>
-          <p:nvPr>
-            <p:ph type="body" idx="1"/>
-          </p:nvPr>
-        </p:nvSpPr>
-        <p:spPr/>
-        <p:txBody>
-          <a:bodyPr/>
-          <a:lstStyle/>
-          <a:p>
-            <a:r>
-              <a:rPr lang="en-US" dirty="0"/>
-              <a:t>Use exit questions to close the session. Collect a few answers orally or in notebook.</a:t>
-            </a:r>
-          </a:p>
-        </p:txBody>
-      </p:sp>
-      <p:sp>
-        <p:nvSpPr>
-          <p:cNvPr id="4" name="Slide Number Placeholder 3"/>
-          <p:cNvSpPr>
-            <a:spLocks noGrp="1"/>
-          </p:cNvSpPr>
-          <p:nvPr>
-            <p:ph type="sldNum" sz="quarter" idx="10"/>
-          </p:nvPr>
-        </p:nvSpPr>
-        <p:spPr/>
-        <p:txBody>
-          <a:bodyPr/>
-          <a:lstStyle/>
-          <a:p>
-            <a:fld id="{F7021451-1387-4CA6-816F-3879F97B5CBC}" type="slidenum">
-              <a:rPr lang="en-US"/>
-              <a:t>16</a:t>
-            </a:fld>
-            <a:endParaRPr lang="en-US"/>
-          </a:p>
-        </p:txBody>
-      </p:sp>
-    </p:spTree>
-    <p:extLst>
-      <p:ext uri="{BB962C8B-B14F-4D97-AF65-F5344CB8AC3E}">
-        <p14:creationId xmlns:p14="http://schemas.microsoft.com/office/powerpoint/2010/main" val="1024086991"/>
-      </p:ext>
-    </p:extLst>
-  </p:cSld>
-  <p:clrMapOvr>
-    <a:masterClrMapping/>
-  </p:clrMapOvr>
-</p:notes>
-</file>
-
 <file path=ppt/notesSlides/notesSlide2.xml><?xml version="1.0" encoding="utf-8"?>
 <p:notes xmlns:a="http://schemas.openxmlformats.org/drawingml/2006/main" xmlns:r="http://schemas.openxmlformats.org/officeDocument/2006/relationships" xmlns:p="http://schemas.openxmlformats.org/presentationml/2006/main">
   <p:cSld>
@@ -2136,30 +1960,6 @@
           <a:chExt cx="0" cy="0"/>
         </a:xfrm>
       </p:grpSpPr>
-      <p:pic>
-        <p:nvPicPr>
-          <p:cNvPr id="2" name="Image 0" descr="/mnt/data/tcs302_docx_extract/word/media/image1.png"/>
-          <p:cNvPicPr>
-            <a:picLocks noChangeAspect="1"/>
-          </p:cNvPicPr>
-          <p:nvPr/>
-        </p:nvPicPr>
-        <p:blipFill>
-          <a:blip r:embed="rId3"/>
-          <a:stretch>
-            <a:fillRect/>
-          </a:stretch>
-        </p:blipFill>
-        <p:spPr>
-          <a:xfrm>
-            <a:off x="320040" y="182880"/>
-            <a:ext cx="3108960" cy="822960"/>
-          </a:xfrm>
-          <a:prstGeom prst="rect">
-            <a:avLst/>
-          </a:prstGeom>
-        </p:spPr>
-      </p:pic>
       <p:sp>
         <p:nvSpPr>
           <p:cNvPr id="3" name="Text 0"/>
@@ -2276,53 +2076,6 @@
               <a:t>Introduction to Data Structures</a:t>
             </a:r>
             <a:endParaRPr lang="en-US" sz="3800" dirty="0"/>
-          </a:p>
-        </p:txBody>
-      </p:sp>
-      <p:sp>
-        <p:nvSpPr>
-          <p:cNvPr id="6" name="Text 3"/>
-          <p:cNvSpPr/>
-          <p:nvPr/>
-        </p:nvSpPr>
-        <p:spPr>
-          <a:xfrm>
-            <a:off x="585216" y="3909060"/>
-            <a:ext cx="5303520" cy="1005840"/>
-          </a:xfrm>
-          <a:prstGeom prst="rect">
-            <a:avLst/>
-          </a:prstGeom>
-          <a:solidFill>
-            <a:srgbClr val="FFFFFF"/>
-          </a:solidFill>
-          <a:ln w="12700">
-            <a:solidFill>
-              <a:srgbClr val="D5E3F5"/>
-            </a:solidFill>
-          </a:ln>
-        </p:spPr>
-        <p:txBody>
-          <a:bodyPr wrap="square" lIns="1524" tIns="1524" rIns="1524" bIns="1524" rtlCol="0" anchor="ctr">
-            <a:normAutofit/>
-          </a:bodyPr>
-          <a:lstStyle/>
-          <a:p>
-            <a:pPr marL="0" indent="0" algn="l">
-              <a:buNone/>
-            </a:pPr>
-            <a:r>
-              <a:rPr lang="en-US" sz="1900" dirty="0">
-                <a:solidFill>
-                  <a:srgbClr val="475569"/>
-                </a:solidFill>
-                <a:latin typeface="Times New Roman" pitchFamily="34" charset="0"/>
-                <a:ea typeface="Times New Roman" pitchFamily="34" charset="-122"/>
-                <a:cs typeface="Times New Roman" pitchFamily="34" charset="-120"/>
-              </a:rPr>
-              <a:t>Today we will understand why computers need data structures before we start coding arrays, stacks, queues, trees and graphs.</a:t>
-            </a:r>
-            <a:endParaRPr lang="en-US" sz="1900" dirty="0"/>
           </a:p>
         </p:txBody>
       </p:sp>
@@ -2410,7 +2163,7 @@
           <p:nvPr/>
         </p:nvPicPr>
         <p:blipFill>
-          <a:blip r:embed="rId4"/>
+          <a:blip r:embed="rId3"/>
           <a:srcRect l="19278" r="19278"/>
           <a:stretch/>
         </p:blipFill>
@@ -3038,45 +2791,6 @@
           </a:p>
         </p:txBody>
       </p:sp>
-      <p:sp>
-        <p:nvSpPr>
-          <p:cNvPr id="15" name="Text 13"/>
-          <p:cNvSpPr/>
-          <p:nvPr/>
-        </p:nvSpPr>
-        <p:spPr>
-          <a:xfrm>
-            <a:off x="548640" y="6483096"/>
-            <a:ext cx="11064240" cy="228600"/>
-          </a:xfrm>
-          <a:prstGeom prst="rect">
-            <a:avLst/>
-          </a:prstGeom>
-          <a:noFill/>
-          <a:ln/>
-        </p:spPr>
-        <p:txBody>
-          <a:bodyPr wrap="square" lIns="254" tIns="254" rIns="254" bIns="254" rtlCol="0" anchor="ctr"/>
-          <a:lstStyle/>
-          <a:p>
-            <a:pPr marL="0" indent="0">
-              <a:buNone/>
-            </a:pPr>
-            <a:r>
-              <a:rPr lang="en-US" sz="1200" i="1" dirty="0">
-                <a:solidFill>
-                  <a:srgbClr val="475569"/>
-                </a:solidFill>
-                <a:latin typeface="Times New Roman" pitchFamily="34" charset="0"/>
-                <a:ea typeface="Times New Roman" pitchFamily="34" charset="-122"/>
-                <a:cs typeface="Times New Roman" pitchFamily="34" charset="-120"/>
-              </a:rPr>
-              <a:t>Teaching cue: Pause for answers; students usually say graph after thinking of stations and connections.</a:t>
-            </a:r>
-            <a:endParaRPr lang="en-US" sz="1200" dirty="0"/>
-          </a:p>
-        </p:txBody>
-      </p:sp>
     </p:spTree>
   </p:cSld>
   <p:clrMapOvr>
@@ -3639,53 +3353,6 @@
       </p:pic>
       <p:sp>
         <p:nvSpPr>
-          <p:cNvPr id="14" name="Text 11"/>
-          <p:cNvSpPr/>
-          <p:nvPr/>
-        </p:nvSpPr>
-        <p:spPr>
-          <a:xfrm>
-            <a:off x="1143000" y="5394960"/>
-            <a:ext cx="9966960" cy="548640"/>
-          </a:xfrm>
-          <a:prstGeom prst="rect">
-            <a:avLst/>
-          </a:prstGeom>
-          <a:solidFill>
-            <a:srgbClr val="F8FAFC"/>
-          </a:solidFill>
-          <a:ln w="12700">
-            <a:solidFill>
-              <a:srgbClr val="CBD5E1"/>
-            </a:solidFill>
-          </a:ln>
-        </p:spPr>
-        <p:txBody>
-          <a:bodyPr wrap="square" lIns="1524" tIns="1524" rIns="1524" bIns="1524" rtlCol="0" anchor="ctr">
-            <a:normAutofit/>
-          </a:bodyPr>
-          <a:lstStyle/>
-          <a:p>
-            <a:pPr marL="0" indent="0" algn="ctr">
-              <a:buNone/>
-            </a:pPr>
-            <a:r>
-              <a:rPr lang="en-US" sz="1900" b="1" dirty="0">
-                <a:solidFill>
-                  <a:srgbClr val="475569"/>
-                </a:solidFill>
-                <a:latin typeface="Times New Roman" pitchFamily="34" charset="0"/>
-                <a:ea typeface="Times New Roman" pitchFamily="34" charset="-122"/>
-                <a:cs typeface="Times New Roman" pitchFamily="34" charset="-120"/>
-              </a:rPr>
-              <a:t>Teaching point: static is simple and fast, dynamic is flexible but requires careful pointer handling.</a:t>
-            </a:r>
-            <a:endParaRPr lang="en-US" sz="1900" dirty="0"/>
-          </a:p>
-        </p:txBody>
-      </p:sp>
-      <p:sp>
-        <p:nvSpPr>
           <p:cNvPr id="15" name="Shape 12"/>
           <p:cNvSpPr/>
           <p:nvPr/>
@@ -3711,45 +3378,6 @@
           <a:lstStyle/>
           <a:p>
             <a:endParaRPr lang="en-IN"/>
-          </a:p>
-        </p:txBody>
-      </p:sp>
-      <p:sp>
-        <p:nvSpPr>
-          <p:cNvPr id="16" name="Text 13"/>
-          <p:cNvSpPr/>
-          <p:nvPr/>
-        </p:nvSpPr>
-        <p:spPr>
-          <a:xfrm>
-            <a:off x="548640" y="6483096"/>
-            <a:ext cx="11064240" cy="228600"/>
-          </a:xfrm>
-          <a:prstGeom prst="rect">
-            <a:avLst/>
-          </a:prstGeom>
-          <a:noFill/>
-          <a:ln/>
-        </p:spPr>
-        <p:txBody>
-          <a:bodyPr wrap="square" lIns="254" tIns="254" rIns="254" bIns="254" rtlCol="0" anchor="ctr"/>
-          <a:lstStyle/>
-          <a:p>
-            <a:pPr marL="0" indent="0">
-              <a:buNone/>
-            </a:pPr>
-            <a:r>
-              <a:rPr lang="en-US" sz="1200" i="1" dirty="0">
-                <a:solidFill>
-                  <a:srgbClr val="475569"/>
-                </a:solidFill>
-                <a:latin typeface="Times New Roman" pitchFamily="34" charset="0"/>
-                <a:ea typeface="Times New Roman" pitchFamily="34" charset="-122"/>
-                <a:cs typeface="Times New Roman" pitchFamily="34" charset="-120"/>
-              </a:rPr>
-              <a:t>Teaching cue: Do not go deep into malloc yet; this is a preview for coming lectures.</a:t>
-            </a:r>
-            <a:endParaRPr lang="en-US" sz="1200" dirty="0"/>
           </a:p>
         </p:txBody>
       </p:sp>
@@ -4495,45 +4123,6 @@
           </a:p>
         </p:txBody>
       </p:sp>
-      <p:sp>
-        <p:nvSpPr>
-          <p:cNvPr id="17" name="Text 15"/>
-          <p:cNvSpPr/>
-          <p:nvPr/>
-        </p:nvSpPr>
-        <p:spPr>
-          <a:xfrm>
-            <a:off x="548640" y="6483096"/>
-            <a:ext cx="11064240" cy="228600"/>
-          </a:xfrm>
-          <a:prstGeom prst="rect">
-            <a:avLst/>
-          </a:prstGeom>
-          <a:noFill/>
-          <a:ln/>
-        </p:spPr>
-        <p:txBody>
-          <a:bodyPr wrap="square" lIns="254" tIns="254" rIns="254" bIns="254" rtlCol="0" anchor="ctr"/>
-          <a:lstStyle/>
-          <a:p>
-            <a:pPr marL="0" indent="0">
-              <a:buNone/>
-            </a:pPr>
-            <a:r>
-              <a:rPr lang="en-US" sz="1200" i="1" dirty="0">
-                <a:solidFill>
-                  <a:srgbClr val="475569"/>
-                </a:solidFill>
-                <a:latin typeface="Times New Roman" pitchFamily="34" charset="0"/>
-                <a:ea typeface="Times New Roman" pitchFamily="34" charset="-122"/>
-                <a:cs typeface="Times New Roman" pitchFamily="34" charset="-120"/>
-              </a:rPr>
-              <a:t>Teaching cue: Let examples come from students; correct gently if analogy is incomplete.</a:t>
-            </a:r>
-            <a:endParaRPr lang="en-US" sz="1200" dirty="0"/>
-          </a:p>
-        </p:txBody>
-      </p:sp>
     </p:spTree>
   </p:cSld>
   <p:clrMapOvr>
@@ -5088,45 +4677,6 @@
           </a:p>
         </p:txBody>
       </p:sp>
-      <p:sp>
-        <p:nvSpPr>
-          <p:cNvPr id="13" name="Text 11"/>
-          <p:cNvSpPr/>
-          <p:nvPr/>
-        </p:nvSpPr>
-        <p:spPr>
-          <a:xfrm>
-            <a:off x="548640" y="6483096"/>
-            <a:ext cx="11064240" cy="228600"/>
-          </a:xfrm>
-          <a:prstGeom prst="rect">
-            <a:avLst/>
-          </a:prstGeom>
-          <a:noFill/>
-          <a:ln/>
-        </p:spPr>
-        <p:txBody>
-          <a:bodyPr wrap="square" lIns="254" tIns="254" rIns="254" bIns="254" rtlCol="0" anchor="ctr"/>
-          <a:lstStyle/>
-          <a:p>
-            <a:pPr marL="0" indent="0">
-              <a:buNone/>
-            </a:pPr>
-            <a:r>
-              <a:rPr lang="en-US" sz="1200" i="1" dirty="0">
-                <a:solidFill>
-                  <a:srgbClr val="475569"/>
-                </a:solidFill>
-                <a:latin typeface="Times New Roman" pitchFamily="34" charset="0"/>
-                <a:ea typeface="Times New Roman" pitchFamily="34" charset="-122"/>
-                <a:cs typeface="Times New Roman" pitchFamily="34" charset="-120"/>
-              </a:rPr>
-              <a:t>Teaching cue: Connect this to engineering problem-solving, not memorization.</a:t>
-            </a:r>
-            <a:endParaRPr lang="en-US" sz="1200" dirty="0"/>
-          </a:p>
-        </p:txBody>
-      </p:sp>
     </p:spTree>
   </p:cSld>
   <p:clrMapOvr>
@@ -5659,8 +5209,8 @@
         </p:nvSpPr>
         <p:spPr>
           <a:xfrm>
-            <a:off x="2788920" y="3749040"/>
-            <a:ext cx="6629400" cy="1234440"/>
+            <a:off x="2788920" y="3749039"/>
+            <a:ext cx="6629400" cy="1874517"/>
           </a:xfrm>
           <a:prstGeom prst="rect">
             <a:avLst/>
@@ -5799,1260 +5349,6 @@
           <a:lstStyle/>
           <a:p>
             <a:endParaRPr lang="en-IN"/>
-          </a:p>
-        </p:txBody>
-      </p:sp>
-      <p:sp>
-        <p:nvSpPr>
-          <p:cNvPr id="14" name="Text 12"/>
-          <p:cNvSpPr/>
-          <p:nvPr/>
-        </p:nvSpPr>
-        <p:spPr>
-          <a:xfrm>
-            <a:off x="548640" y="6483096"/>
-            <a:ext cx="11064240" cy="228600"/>
-          </a:xfrm>
-          <a:prstGeom prst="rect">
-            <a:avLst/>
-          </a:prstGeom>
-          <a:noFill/>
-          <a:ln/>
-        </p:spPr>
-        <p:txBody>
-          <a:bodyPr wrap="square" lIns="254" tIns="254" rIns="254" bIns="254" rtlCol="0" anchor="ctr"/>
-          <a:lstStyle/>
-          <a:p>
-            <a:pPr marL="0" indent="0">
-              <a:buNone/>
-            </a:pPr>
-            <a:r>
-              <a:rPr lang="en-US" sz="1200" i="1" dirty="0">
-                <a:solidFill>
-                  <a:srgbClr val="475569"/>
-                </a:solidFill>
-                <a:latin typeface="Times New Roman" pitchFamily="34" charset="0"/>
-                <a:ea typeface="Times New Roman" pitchFamily="34" charset="-122"/>
-                <a:cs typeface="Times New Roman" pitchFamily="34" charset="-120"/>
-              </a:rPr>
-              <a:t>Teaching cue: Read the code aloud and ask what s[60] represents.</a:t>
-            </a:r>
-            <a:endParaRPr lang="en-US" sz="1200" dirty="0"/>
-          </a:p>
-        </p:txBody>
-      </p:sp>
-    </p:spTree>
-  </p:cSld>
-  <p:clrMapOvr>
-    <a:masterClrMapping/>
-  </p:clrMapOvr>
-</p:sld>
-</file>
-
-<file path=ppt/slides/slide15.xml><?xml version="1.0" encoding="utf-8"?>
-<p:sld xmlns:a="http://schemas.openxmlformats.org/drawingml/2006/main" xmlns:r="http://schemas.openxmlformats.org/officeDocument/2006/relationships" xmlns:p="http://schemas.openxmlformats.org/presentationml/2006/main">
-  <p:cSld name="Slide 15">
-    <p:bg>
-      <p:bgPr>
-        <a:solidFill>
-          <a:srgbClr val="F7FAFC"/>
-        </a:solidFill>
-        <a:effectLst/>
-      </p:bgPr>
-    </p:bg>
-    <p:spTree>
-      <p:nvGrpSpPr>
-        <p:cNvPr id="1" name=""/>
-        <p:cNvGrpSpPr/>
-        <p:nvPr/>
-      </p:nvGrpSpPr>
-      <p:grpSpPr>
-        <a:xfrm>
-          <a:off x="0" y="0"/>
-          <a:ext cx="0" cy="0"/>
-          <a:chOff x="0" y="0"/>
-          <a:chExt cx="0" cy="0"/>
-        </a:xfrm>
-      </p:grpSpPr>
-      <p:sp>
-        <p:nvSpPr>
-          <p:cNvPr id="2" name="Shape 0"/>
-          <p:cNvSpPr/>
-          <p:nvPr/>
-        </p:nvSpPr>
-        <p:spPr>
-          <a:xfrm>
-            <a:off x="0" y="0"/>
-            <a:ext cx="12191695" cy="438912"/>
-          </a:xfrm>
-          <a:prstGeom prst="rect">
-            <a:avLst/>
-          </a:prstGeom>
-          <a:solidFill>
-            <a:srgbClr val="13294B"/>
-          </a:solidFill>
-          <a:ln w="12700">
-            <a:solidFill>
-              <a:srgbClr val="13294B"/>
-            </a:solidFill>
-            <a:prstDash val="solid"/>
-          </a:ln>
-        </p:spPr>
-        <p:txBody>
-          <a:bodyPr/>
-          <a:lstStyle/>
-          <a:p>
-            <a:endParaRPr lang="en-IN"/>
-          </a:p>
-        </p:txBody>
-      </p:sp>
-      <p:sp>
-        <p:nvSpPr>
-          <p:cNvPr id="3" name="Text 1"/>
-          <p:cNvSpPr/>
-          <p:nvPr/>
-        </p:nvSpPr>
-        <p:spPr>
-          <a:xfrm>
-            <a:off x="320040" y="109728"/>
-            <a:ext cx="4206240" cy="201168"/>
-          </a:xfrm>
-          <a:prstGeom prst="rect">
-            <a:avLst/>
-          </a:prstGeom>
-          <a:noFill/>
-          <a:ln/>
-        </p:spPr>
-        <p:txBody>
-          <a:bodyPr wrap="square" lIns="0" tIns="0" rIns="0" bIns="0" rtlCol="0" anchor="ctr"/>
-          <a:lstStyle/>
-          <a:p>
-            <a:pPr marL="0" indent="0">
-              <a:buNone/>
-            </a:pPr>
-            <a:r>
-              <a:rPr lang="en-US" sz="1050" b="1" dirty="0">
-                <a:solidFill>
-                  <a:srgbClr val="FFFFFF"/>
-                </a:solidFill>
-                <a:latin typeface="Times New Roman" pitchFamily="34" charset="0"/>
-                <a:ea typeface="Times New Roman" pitchFamily="34" charset="-122"/>
-                <a:cs typeface="Times New Roman" pitchFamily="34" charset="-120"/>
-              </a:rPr>
-              <a:t>TCS302: Data Structures with C</a:t>
-            </a:r>
-            <a:endParaRPr lang="en-US" sz="1050" dirty="0"/>
-          </a:p>
-        </p:txBody>
-      </p:sp>
-      <p:sp>
-        <p:nvSpPr>
-          <p:cNvPr id="4" name="Text 2"/>
-          <p:cNvSpPr/>
-          <p:nvPr/>
-        </p:nvSpPr>
-        <p:spPr>
-          <a:xfrm>
-            <a:off x="8412480" y="109728"/>
-            <a:ext cx="1920240" cy="201168"/>
-          </a:xfrm>
-          <a:prstGeom prst="rect">
-            <a:avLst/>
-          </a:prstGeom>
-          <a:noFill/>
-          <a:ln/>
-        </p:spPr>
-        <p:txBody>
-          <a:bodyPr wrap="square" lIns="0" tIns="0" rIns="0" bIns="0" rtlCol="0" anchor="ctr"/>
-          <a:lstStyle/>
-          <a:p>
-            <a:pPr marL="0" indent="0" algn="r">
-              <a:buNone/>
-            </a:pPr>
-            <a:r>
-              <a:rPr lang="en-US" sz="1050" dirty="0">
-                <a:solidFill>
-                  <a:srgbClr val="FFFFFF"/>
-                </a:solidFill>
-                <a:latin typeface="Times New Roman" pitchFamily="34" charset="0"/>
-                <a:ea typeface="Times New Roman" pitchFamily="34" charset="-122"/>
-                <a:cs typeface="Times New Roman" pitchFamily="34" charset="-120"/>
-              </a:rPr>
-              <a:t>Unit 1 | Lecture 1</a:t>
-            </a:r>
-            <a:endParaRPr lang="en-US" sz="1050" dirty="0"/>
-          </a:p>
-        </p:txBody>
-      </p:sp>
-      <p:sp>
-        <p:nvSpPr>
-          <p:cNvPr id="5" name="Text 3"/>
-          <p:cNvSpPr/>
-          <p:nvPr/>
-        </p:nvSpPr>
-        <p:spPr>
-          <a:xfrm>
-            <a:off x="10972800" y="109728"/>
-            <a:ext cx="777240" cy="201168"/>
-          </a:xfrm>
-          <a:prstGeom prst="rect">
-            <a:avLst/>
-          </a:prstGeom>
-          <a:noFill/>
-          <a:ln/>
-        </p:spPr>
-        <p:txBody>
-          <a:bodyPr wrap="square" lIns="0" tIns="0" rIns="0" bIns="0" rtlCol="0" anchor="ctr"/>
-          <a:lstStyle/>
-          <a:p>
-            <a:pPr marL="0" indent="0" algn="r">
-              <a:buNone/>
-            </a:pPr>
-            <a:r>
-              <a:rPr lang="en-US" sz="1050" dirty="0">
-                <a:solidFill>
-                  <a:srgbClr val="FFFFFF"/>
-                </a:solidFill>
-                <a:latin typeface="Times New Roman" pitchFamily="34" charset="0"/>
-                <a:ea typeface="Times New Roman" pitchFamily="34" charset="-122"/>
-                <a:cs typeface="Times New Roman" pitchFamily="34" charset="-120"/>
-              </a:rPr>
-              <a:t>15</a:t>
-            </a:r>
-            <a:endParaRPr lang="en-US" sz="1050" dirty="0"/>
-          </a:p>
-        </p:txBody>
-      </p:sp>
-      <p:sp>
-        <p:nvSpPr>
-          <p:cNvPr id="6" name="Text 4"/>
-          <p:cNvSpPr/>
-          <p:nvPr/>
-        </p:nvSpPr>
-        <p:spPr>
-          <a:xfrm>
-            <a:off x="502920" y="685800"/>
-            <a:ext cx="11155680" cy="438912"/>
-          </a:xfrm>
-          <a:prstGeom prst="rect">
-            <a:avLst/>
-          </a:prstGeom>
-          <a:noFill/>
-          <a:ln/>
-        </p:spPr>
-        <p:txBody>
-          <a:bodyPr wrap="square" lIns="0" tIns="0" rIns="0" bIns="0" rtlCol="0" anchor="ctr"/>
-          <a:lstStyle/>
-          <a:p>
-            <a:pPr marL="0" indent="0">
-              <a:buNone/>
-            </a:pPr>
-            <a:r>
-              <a:rPr lang="en-US" sz="2600" b="1" dirty="0">
-                <a:solidFill>
-                  <a:srgbClr val="13294B"/>
-                </a:solidFill>
-                <a:latin typeface="Times New Roman" pitchFamily="34" charset="0"/>
-                <a:ea typeface="Times New Roman" pitchFamily="34" charset="-122"/>
-                <a:cs typeface="Times New Roman" pitchFamily="34" charset="-120"/>
-              </a:rPr>
-              <a:t>Mini Classroom Activity</a:t>
-            </a:r>
-            <a:endParaRPr lang="en-US" sz="2600" dirty="0"/>
-          </a:p>
-        </p:txBody>
-      </p:sp>
-      <p:sp>
-        <p:nvSpPr>
-          <p:cNvPr id="7" name="Text 5"/>
-          <p:cNvSpPr/>
-          <p:nvPr/>
-        </p:nvSpPr>
-        <p:spPr>
-          <a:xfrm>
-            <a:off x="868680" y="1325880"/>
-            <a:ext cx="2103120" cy="502920"/>
-          </a:xfrm>
-          <a:prstGeom prst="rect">
-            <a:avLst/>
-          </a:prstGeom>
-          <a:solidFill>
-            <a:srgbClr val="F97316"/>
-          </a:solidFill>
-          <a:ln w="12700">
-            <a:solidFill>
-              <a:srgbClr val="F97316"/>
-            </a:solidFill>
-          </a:ln>
-        </p:spPr>
-        <p:txBody>
-          <a:bodyPr wrap="square" lIns="1524" tIns="1524" rIns="1524" bIns="1524" rtlCol="0" anchor="ctr">
-            <a:normAutofit/>
-          </a:bodyPr>
-          <a:lstStyle/>
-          <a:p>
-            <a:pPr marL="0" indent="0" algn="ctr">
-              <a:buNone/>
-            </a:pPr>
-            <a:r>
-              <a:rPr lang="en-US" sz="2200" b="1" dirty="0">
-                <a:solidFill>
-                  <a:srgbClr val="FFFFFF"/>
-                </a:solidFill>
-                <a:latin typeface="Times New Roman" pitchFamily="34" charset="0"/>
-                <a:ea typeface="Times New Roman" pitchFamily="34" charset="-122"/>
-                <a:cs typeface="Times New Roman" pitchFamily="34" charset="-120"/>
-              </a:rPr>
-              <a:t>Problem</a:t>
-            </a:r>
-            <a:endParaRPr lang="en-US" sz="2200" dirty="0"/>
-          </a:p>
-        </p:txBody>
-      </p:sp>
-      <p:sp>
-        <p:nvSpPr>
-          <p:cNvPr id="8" name="Text 6"/>
-          <p:cNvSpPr/>
-          <p:nvPr/>
-        </p:nvSpPr>
-        <p:spPr>
-          <a:xfrm>
-            <a:off x="3246120" y="1325880"/>
-            <a:ext cx="8046720" cy="713232"/>
-          </a:xfrm>
-          <a:prstGeom prst="rect">
-            <a:avLst/>
-          </a:prstGeom>
-          <a:solidFill>
-            <a:srgbClr val="FFF7ED"/>
-          </a:solidFill>
-          <a:ln w="12700">
-            <a:solidFill>
-              <a:srgbClr val="FDBA74"/>
-            </a:solidFill>
-          </a:ln>
-        </p:spPr>
-        <p:txBody>
-          <a:bodyPr wrap="square" lIns="1524" tIns="1524" rIns="1524" bIns="1524" rtlCol="0" anchor="ctr">
-            <a:normAutofit/>
-          </a:bodyPr>
-          <a:lstStyle/>
-          <a:p>
-            <a:pPr marL="0" indent="0" algn="l">
-              <a:buNone/>
-            </a:pPr>
-            <a:r>
-              <a:rPr lang="en-US" sz="2100" b="1" dirty="0">
-                <a:solidFill>
-                  <a:srgbClr val="13294B"/>
-                </a:solidFill>
-                <a:latin typeface="Times New Roman" pitchFamily="34" charset="0"/>
-                <a:ea typeface="Times New Roman" pitchFamily="34" charset="-122"/>
-                <a:cs typeface="Times New Roman" pitchFamily="34" charset="-120"/>
-              </a:rPr>
-              <a:t>A library wants to store book records. Each book has book ID, title, author and availability status.</a:t>
-            </a:r>
-            <a:endParaRPr lang="en-US" sz="2100" dirty="0"/>
-          </a:p>
-        </p:txBody>
-      </p:sp>
-      <p:sp>
-        <p:nvSpPr>
-          <p:cNvPr id="9" name="Text 7"/>
-          <p:cNvSpPr/>
-          <p:nvPr/>
-        </p:nvSpPr>
-        <p:spPr>
-          <a:xfrm>
-            <a:off x="914400" y="2651760"/>
-            <a:ext cx="4114800" cy="502920"/>
-          </a:xfrm>
-          <a:prstGeom prst="rect">
-            <a:avLst/>
-          </a:prstGeom>
-          <a:solidFill>
-            <a:srgbClr val="E0F2FE"/>
-          </a:solidFill>
-          <a:ln w="12700">
-            <a:solidFill>
-              <a:srgbClr val="7DD3FC"/>
-            </a:solidFill>
-          </a:ln>
-        </p:spPr>
-        <p:txBody>
-          <a:bodyPr wrap="square" lIns="1524" tIns="1524" rIns="1524" bIns="1524" rtlCol="0" anchor="ctr">
-            <a:normAutofit/>
-          </a:bodyPr>
-          <a:lstStyle/>
-          <a:p>
-            <a:pPr marL="0" indent="0" algn="ctr">
-              <a:buNone/>
-            </a:pPr>
-            <a:r>
-              <a:rPr lang="en-US" sz="2200" b="1" dirty="0">
-                <a:solidFill>
-                  <a:srgbClr val="1C64F2"/>
-                </a:solidFill>
-                <a:latin typeface="Times New Roman" pitchFamily="34" charset="0"/>
-                <a:ea typeface="Times New Roman" pitchFamily="34" charset="-122"/>
-                <a:cs typeface="Times New Roman" pitchFamily="34" charset="-120"/>
-              </a:rPr>
-              <a:t>Discuss in pairs for 3 minutes:</a:t>
-            </a:r>
-            <a:endParaRPr lang="en-US" sz="2200" dirty="0"/>
-          </a:p>
-        </p:txBody>
-      </p:sp>
-      <p:sp>
-        <p:nvSpPr>
-          <p:cNvPr id="10" name="Text 8"/>
-          <p:cNvSpPr/>
-          <p:nvPr/>
-        </p:nvSpPr>
-        <p:spPr>
-          <a:xfrm>
-            <a:off x="1005840" y="3429000"/>
-            <a:ext cx="4572000" cy="1737360"/>
-          </a:xfrm>
-          <a:prstGeom prst="rect">
-            <a:avLst/>
-          </a:prstGeom>
-          <a:noFill/>
-          <a:ln/>
-        </p:spPr>
-        <p:txBody>
-          <a:bodyPr wrap="square" lIns="1016" tIns="1016" rIns="1016" bIns="1016" rtlCol="0" anchor="t">
-            <a:normAutofit/>
-          </a:bodyPr>
-          <a:lstStyle/>
-          <a:p>
-            <a:pPr marL="177800" indent="-177800">
-              <a:buSzPct val="100000"/>
-              <a:buChar char="•"/>
-            </a:pPr>
-            <a:r>
-              <a:rPr lang="en-US" sz="2000" dirty="0">
-                <a:solidFill>
-                  <a:srgbClr val="111827"/>
-                </a:solidFill>
-                <a:latin typeface="Times New Roman" pitchFamily="34" charset="0"/>
-                <a:ea typeface="Times New Roman" pitchFamily="34" charset="-122"/>
-                <a:cs typeface="Times New Roman" pitchFamily="34" charset="-120"/>
-              </a:rPr>
-              <a:t>What should be one record?</a:t>
-            </a:r>
-            <a:endParaRPr lang="en-US" sz="2000" dirty="0"/>
-          </a:p>
-          <a:p>
-            <a:pPr marL="177800" indent="-177800">
-              <a:buSzPct val="100000"/>
-              <a:buChar char="•"/>
-            </a:pPr>
-            <a:r>
-              <a:rPr lang="en-US" sz="2000" dirty="0">
-                <a:solidFill>
-                  <a:srgbClr val="111827"/>
-                </a:solidFill>
-                <a:latin typeface="Times New Roman" pitchFamily="34" charset="0"/>
-                <a:ea typeface="Times New Roman" pitchFamily="34" charset="-122"/>
-                <a:cs typeface="Times New Roman" pitchFamily="34" charset="-120"/>
-              </a:rPr>
-              <a:t>What fields should it contain?</a:t>
-            </a:r>
-            <a:endParaRPr lang="en-US" sz="2000" dirty="0"/>
-          </a:p>
-          <a:p>
-            <a:pPr marL="177800" indent="-177800">
-              <a:buSzPct val="100000"/>
-              <a:buChar char="•"/>
-            </a:pPr>
-            <a:r>
-              <a:rPr lang="en-US" sz="2000" dirty="0">
-                <a:solidFill>
-                  <a:srgbClr val="111827"/>
-                </a:solidFill>
-                <a:latin typeface="Times New Roman" pitchFamily="34" charset="0"/>
-                <a:ea typeface="Times New Roman" pitchFamily="34" charset="-122"/>
-                <a:cs typeface="Times New Roman" pitchFamily="34" charset="-120"/>
-              </a:rPr>
-              <a:t>Would you store all books in an array or linked list?</a:t>
-            </a:r>
-            <a:endParaRPr lang="en-US" sz="2000" dirty="0"/>
-          </a:p>
-          <a:p>
-            <a:pPr marL="177800" indent="-177800">
-              <a:buSzPct val="100000"/>
-              <a:buChar char="•"/>
-            </a:pPr>
-            <a:r>
-              <a:rPr lang="en-US" sz="2000" dirty="0">
-                <a:solidFill>
-                  <a:srgbClr val="111827"/>
-                </a:solidFill>
-                <a:latin typeface="Times New Roman" pitchFamily="34" charset="0"/>
-                <a:ea typeface="Times New Roman" pitchFamily="34" charset="-122"/>
-                <a:cs typeface="Times New Roman" pitchFamily="34" charset="-120"/>
-              </a:rPr>
-              <a:t>Which operations will be frequent?</a:t>
-            </a:r>
-            <a:endParaRPr lang="en-US" sz="2000" dirty="0"/>
-          </a:p>
-        </p:txBody>
-      </p:sp>
-      <p:sp>
-        <p:nvSpPr>
-          <p:cNvPr id="11" name="Text 9"/>
-          <p:cNvSpPr/>
-          <p:nvPr/>
-        </p:nvSpPr>
-        <p:spPr>
-          <a:xfrm>
-            <a:off x="6263640" y="2880360"/>
-            <a:ext cx="4754880" cy="1600200"/>
-          </a:xfrm>
-          <a:prstGeom prst="rect">
-            <a:avLst/>
-          </a:prstGeom>
-          <a:solidFill>
-            <a:srgbClr val="ECFDF5"/>
-          </a:solidFill>
-          <a:ln w="12700">
-            <a:solidFill>
-              <a:srgbClr val="86EFAC"/>
-            </a:solidFill>
-          </a:ln>
-        </p:spPr>
-        <p:txBody>
-          <a:bodyPr wrap="square" lIns="1524" tIns="1524" rIns="1524" bIns="1524" rtlCol="0" anchor="ctr">
-            <a:normAutofit/>
-          </a:bodyPr>
-          <a:lstStyle/>
-          <a:p>
-            <a:pPr marL="0" indent="0" algn="ctr">
-              <a:buNone/>
-            </a:pPr>
-            <a:r>
-              <a:rPr lang="en-US" sz="2000" b="1" dirty="0">
-                <a:solidFill>
-                  <a:srgbClr val="15803D"/>
-                </a:solidFill>
-                <a:latin typeface="Times New Roman" pitchFamily="34" charset="0"/>
-                <a:ea typeface="Times New Roman" pitchFamily="34" charset="-122"/>
-                <a:cs typeface="Times New Roman" pitchFamily="34" charset="-120"/>
-              </a:rPr>
-              <a:t>Expected direction: A book record can be represented using a structure; multiple book records can be stored in an array if total size is fixed.</a:t>
-            </a:r>
-            <a:endParaRPr lang="en-US" sz="2000" dirty="0"/>
-          </a:p>
-        </p:txBody>
-      </p:sp>
-      <p:sp>
-        <p:nvSpPr>
-          <p:cNvPr id="12" name="Shape 10"/>
-          <p:cNvSpPr/>
-          <p:nvPr/>
-        </p:nvSpPr>
-        <p:spPr>
-          <a:xfrm>
-            <a:off x="502920" y="6419088"/>
-            <a:ext cx="11201400" cy="0"/>
-          </a:xfrm>
-          <a:prstGeom prst="line">
-            <a:avLst/>
-          </a:prstGeom>
-          <a:noFill/>
-          <a:ln w="12700">
-            <a:solidFill>
-              <a:srgbClr val="D6DEE9"/>
-            </a:solidFill>
-            <a:prstDash val="solid"/>
-          </a:ln>
-        </p:spPr>
-        <p:txBody>
-          <a:bodyPr/>
-          <a:lstStyle/>
-          <a:p>
-            <a:endParaRPr lang="en-IN"/>
-          </a:p>
-        </p:txBody>
-      </p:sp>
-      <p:sp>
-        <p:nvSpPr>
-          <p:cNvPr id="13" name="Text 11"/>
-          <p:cNvSpPr/>
-          <p:nvPr/>
-        </p:nvSpPr>
-        <p:spPr>
-          <a:xfrm>
-            <a:off x="548640" y="6483096"/>
-            <a:ext cx="11064240" cy="228600"/>
-          </a:xfrm>
-          <a:prstGeom prst="rect">
-            <a:avLst/>
-          </a:prstGeom>
-          <a:noFill/>
-          <a:ln/>
-        </p:spPr>
-        <p:txBody>
-          <a:bodyPr wrap="square" lIns="254" tIns="254" rIns="254" bIns="254" rtlCol="0" anchor="ctr"/>
-          <a:lstStyle/>
-          <a:p>
-            <a:pPr marL="0" indent="0">
-              <a:buNone/>
-            </a:pPr>
-            <a:r>
-              <a:rPr lang="en-US" sz="1200" i="1" dirty="0">
-                <a:solidFill>
-                  <a:srgbClr val="475569"/>
-                </a:solidFill>
-                <a:latin typeface="Times New Roman" pitchFamily="34" charset="0"/>
-                <a:ea typeface="Times New Roman" pitchFamily="34" charset="-122"/>
-                <a:cs typeface="Times New Roman" pitchFamily="34" charset="-120"/>
-              </a:rPr>
-              <a:t>Teaching cue: Use this as formative assessment before the recap.</a:t>
-            </a:r>
-            <a:endParaRPr lang="en-US" sz="1200" dirty="0"/>
-          </a:p>
-        </p:txBody>
-      </p:sp>
-    </p:spTree>
-  </p:cSld>
-  <p:clrMapOvr>
-    <a:masterClrMapping/>
-  </p:clrMapOvr>
-</p:sld>
-</file>
-
-<file path=ppt/slides/slide16.xml><?xml version="1.0" encoding="utf-8"?>
-<p:sld xmlns:a="http://schemas.openxmlformats.org/drawingml/2006/main" xmlns:r="http://schemas.openxmlformats.org/officeDocument/2006/relationships" xmlns:p="http://schemas.openxmlformats.org/presentationml/2006/main">
-  <p:cSld name="Slide 16">
-    <p:bg>
-      <p:bgPr>
-        <a:solidFill>
-          <a:srgbClr val="F7FAFC"/>
-        </a:solidFill>
-        <a:effectLst/>
-      </p:bgPr>
-    </p:bg>
-    <p:spTree>
-      <p:nvGrpSpPr>
-        <p:cNvPr id="1" name=""/>
-        <p:cNvGrpSpPr/>
-        <p:nvPr/>
-      </p:nvGrpSpPr>
-      <p:grpSpPr>
-        <a:xfrm>
-          <a:off x="0" y="0"/>
-          <a:ext cx="0" cy="0"/>
-          <a:chOff x="0" y="0"/>
-          <a:chExt cx="0" cy="0"/>
-        </a:xfrm>
-      </p:grpSpPr>
-      <p:sp>
-        <p:nvSpPr>
-          <p:cNvPr id="2" name="Shape 0"/>
-          <p:cNvSpPr/>
-          <p:nvPr/>
-        </p:nvSpPr>
-        <p:spPr>
-          <a:xfrm>
-            <a:off x="0" y="0"/>
-            <a:ext cx="12191695" cy="438912"/>
-          </a:xfrm>
-          <a:prstGeom prst="rect">
-            <a:avLst/>
-          </a:prstGeom>
-          <a:solidFill>
-            <a:srgbClr val="13294B"/>
-          </a:solidFill>
-          <a:ln w="12700">
-            <a:solidFill>
-              <a:srgbClr val="13294B"/>
-            </a:solidFill>
-            <a:prstDash val="solid"/>
-          </a:ln>
-        </p:spPr>
-        <p:txBody>
-          <a:bodyPr/>
-          <a:lstStyle/>
-          <a:p>
-            <a:endParaRPr lang="en-IN"/>
-          </a:p>
-        </p:txBody>
-      </p:sp>
-      <p:sp>
-        <p:nvSpPr>
-          <p:cNvPr id="3" name="Text 1"/>
-          <p:cNvSpPr/>
-          <p:nvPr/>
-        </p:nvSpPr>
-        <p:spPr>
-          <a:xfrm>
-            <a:off x="320040" y="109728"/>
-            <a:ext cx="4206240" cy="201168"/>
-          </a:xfrm>
-          <a:prstGeom prst="rect">
-            <a:avLst/>
-          </a:prstGeom>
-          <a:noFill/>
-          <a:ln/>
-        </p:spPr>
-        <p:txBody>
-          <a:bodyPr wrap="square" lIns="0" tIns="0" rIns="0" bIns="0" rtlCol="0" anchor="ctr"/>
-          <a:lstStyle/>
-          <a:p>
-            <a:pPr marL="0" indent="0">
-              <a:buNone/>
-            </a:pPr>
-            <a:r>
-              <a:rPr lang="en-US" sz="1050" b="1" dirty="0">
-                <a:solidFill>
-                  <a:srgbClr val="FFFFFF"/>
-                </a:solidFill>
-                <a:latin typeface="Times New Roman" pitchFamily="34" charset="0"/>
-                <a:ea typeface="Times New Roman" pitchFamily="34" charset="-122"/>
-                <a:cs typeface="Times New Roman" pitchFamily="34" charset="-120"/>
-              </a:rPr>
-              <a:t>TCS302: Data Structures with C</a:t>
-            </a:r>
-            <a:endParaRPr lang="en-US" sz="1050" dirty="0"/>
-          </a:p>
-        </p:txBody>
-      </p:sp>
-      <p:sp>
-        <p:nvSpPr>
-          <p:cNvPr id="4" name="Text 2"/>
-          <p:cNvSpPr/>
-          <p:nvPr/>
-        </p:nvSpPr>
-        <p:spPr>
-          <a:xfrm>
-            <a:off x="8412480" y="109728"/>
-            <a:ext cx="1920240" cy="201168"/>
-          </a:xfrm>
-          <a:prstGeom prst="rect">
-            <a:avLst/>
-          </a:prstGeom>
-          <a:noFill/>
-          <a:ln/>
-        </p:spPr>
-        <p:txBody>
-          <a:bodyPr wrap="square" lIns="0" tIns="0" rIns="0" bIns="0" rtlCol="0" anchor="ctr"/>
-          <a:lstStyle/>
-          <a:p>
-            <a:pPr marL="0" indent="0" algn="r">
-              <a:buNone/>
-            </a:pPr>
-            <a:r>
-              <a:rPr lang="en-US" sz="1050" dirty="0">
-                <a:solidFill>
-                  <a:srgbClr val="FFFFFF"/>
-                </a:solidFill>
-                <a:latin typeface="Times New Roman" pitchFamily="34" charset="0"/>
-                <a:ea typeface="Times New Roman" pitchFamily="34" charset="-122"/>
-                <a:cs typeface="Times New Roman" pitchFamily="34" charset="-120"/>
-              </a:rPr>
-              <a:t>Unit 1 | Lecture 1</a:t>
-            </a:r>
-            <a:endParaRPr lang="en-US" sz="1050" dirty="0"/>
-          </a:p>
-        </p:txBody>
-      </p:sp>
-      <p:sp>
-        <p:nvSpPr>
-          <p:cNvPr id="5" name="Text 3"/>
-          <p:cNvSpPr/>
-          <p:nvPr/>
-        </p:nvSpPr>
-        <p:spPr>
-          <a:xfrm>
-            <a:off x="10972800" y="109728"/>
-            <a:ext cx="777240" cy="201168"/>
-          </a:xfrm>
-          <a:prstGeom prst="rect">
-            <a:avLst/>
-          </a:prstGeom>
-          <a:noFill/>
-          <a:ln/>
-        </p:spPr>
-        <p:txBody>
-          <a:bodyPr wrap="square" lIns="0" tIns="0" rIns="0" bIns="0" rtlCol="0" anchor="ctr"/>
-          <a:lstStyle/>
-          <a:p>
-            <a:pPr marL="0" indent="0" algn="r">
-              <a:buNone/>
-            </a:pPr>
-            <a:r>
-              <a:rPr lang="en-US" sz="1050" dirty="0">
-                <a:solidFill>
-                  <a:srgbClr val="FFFFFF"/>
-                </a:solidFill>
-                <a:latin typeface="Times New Roman" pitchFamily="34" charset="0"/>
-                <a:ea typeface="Times New Roman" pitchFamily="34" charset="-122"/>
-                <a:cs typeface="Times New Roman" pitchFamily="34" charset="-120"/>
-              </a:rPr>
-              <a:t>16</a:t>
-            </a:r>
-            <a:endParaRPr lang="en-US" sz="1050" dirty="0"/>
-          </a:p>
-        </p:txBody>
-      </p:sp>
-      <p:sp>
-        <p:nvSpPr>
-          <p:cNvPr id="6" name="Text 4"/>
-          <p:cNvSpPr/>
-          <p:nvPr/>
-        </p:nvSpPr>
-        <p:spPr>
-          <a:xfrm>
-            <a:off x="502920" y="685800"/>
-            <a:ext cx="11155680" cy="438912"/>
-          </a:xfrm>
-          <a:prstGeom prst="rect">
-            <a:avLst/>
-          </a:prstGeom>
-          <a:noFill/>
-          <a:ln/>
-        </p:spPr>
-        <p:txBody>
-          <a:bodyPr wrap="square" lIns="0" tIns="0" rIns="0" bIns="0" rtlCol="0" anchor="ctr"/>
-          <a:lstStyle/>
-          <a:p>
-            <a:pPr marL="0" indent="0">
-              <a:buNone/>
-            </a:pPr>
-            <a:r>
-              <a:rPr lang="en-US" sz="2600" b="1" dirty="0">
-                <a:solidFill>
-                  <a:srgbClr val="13294B"/>
-                </a:solidFill>
-                <a:latin typeface="Times New Roman" pitchFamily="34" charset="0"/>
-                <a:ea typeface="Times New Roman" pitchFamily="34" charset="-122"/>
-                <a:cs typeface="Times New Roman" pitchFamily="34" charset="-120"/>
-              </a:rPr>
-              <a:t>Recap and Exit Questions</a:t>
-            </a:r>
-            <a:endParaRPr lang="en-US" sz="2600" dirty="0"/>
-          </a:p>
-        </p:txBody>
-      </p:sp>
-      <p:sp>
-        <p:nvSpPr>
-          <p:cNvPr id="7" name="Text 5"/>
-          <p:cNvSpPr/>
-          <p:nvPr/>
-        </p:nvSpPr>
-        <p:spPr>
-          <a:xfrm>
-            <a:off x="777240" y="1325880"/>
-            <a:ext cx="3931920" cy="502920"/>
-          </a:xfrm>
-          <a:prstGeom prst="rect">
-            <a:avLst/>
-          </a:prstGeom>
-          <a:solidFill>
-            <a:srgbClr val="DBEAFE"/>
-          </a:solidFill>
-          <a:ln w="12700">
-            <a:solidFill>
-              <a:srgbClr val="60A5FA"/>
-            </a:solidFill>
-          </a:ln>
-        </p:spPr>
-        <p:txBody>
-          <a:bodyPr wrap="square" lIns="1524" tIns="1524" rIns="1524" bIns="1524" rtlCol="0" anchor="ctr">
-            <a:normAutofit/>
-          </a:bodyPr>
-          <a:lstStyle/>
-          <a:p>
-            <a:pPr marL="0" indent="0" algn="ctr">
-              <a:buNone/>
-            </a:pPr>
-            <a:r>
-              <a:rPr lang="en-US" sz="2400" b="1" dirty="0">
-                <a:solidFill>
-                  <a:srgbClr val="13294B"/>
-                </a:solidFill>
-                <a:latin typeface="Times New Roman" pitchFamily="34" charset="0"/>
-                <a:ea typeface="Times New Roman" pitchFamily="34" charset="-122"/>
-                <a:cs typeface="Times New Roman" pitchFamily="34" charset="-120"/>
-              </a:rPr>
-              <a:t>What we learned today</a:t>
-            </a:r>
-            <a:endParaRPr lang="en-US" sz="2400" dirty="0"/>
-          </a:p>
-        </p:txBody>
-      </p:sp>
-      <p:sp>
-        <p:nvSpPr>
-          <p:cNvPr id="8" name="Text 6"/>
-          <p:cNvSpPr/>
-          <p:nvPr/>
-        </p:nvSpPr>
-        <p:spPr>
-          <a:xfrm>
-            <a:off x="868680" y="2057400"/>
-            <a:ext cx="4892040" cy="2834640"/>
-          </a:xfrm>
-          <a:prstGeom prst="rect">
-            <a:avLst/>
-          </a:prstGeom>
-          <a:noFill/>
-          <a:ln/>
-        </p:spPr>
-        <p:txBody>
-          <a:bodyPr wrap="square" lIns="1016" tIns="1016" rIns="1016" bIns="1016" rtlCol="0" anchor="t">
-            <a:normAutofit/>
-          </a:bodyPr>
-          <a:lstStyle/>
-          <a:p>
-            <a:pPr marL="177800" indent="-177800">
-              <a:buSzPct val="100000"/>
-              <a:buChar char="•"/>
-            </a:pPr>
-            <a:r>
-              <a:rPr lang="en-US" sz="1800" dirty="0">
-                <a:solidFill>
-                  <a:srgbClr val="111827"/>
-                </a:solidFill>
-                <a:latin typeface="Times New Roman" pitchFamily="34" charset="0"/>
-                <a:ea typeface="Times New Roman" pitchFamily="34" charset="-122"/>
-                <a:cs typeface="Times New Roman" pitchFamily="34" charset="-120"/>
-              </a:rPr>
-              <a:t>Data structures organize data in memory.</a:t>
-            </a:r>
-            <a:endParaRPr lang="en-US" sz="1800" dirty="0"/>
-          </a:p>
-          <a:p>
-            <a:pPr marL="177800" indent="-177800">
-              <a:buSzPct val="100000"/>
-              <a:buChar char="•"/>
-            </a:pPr>
-            <a:r>
-              <a:rPr lang="en-US" sz="1800" dirty="0">
-                <a:solidFill>
-                  <a:srgbClr val="111827"/>
-                </a:solidFill>
-                <a:latin typeface="Times New Roman" pitchFamily="34" charset="0"/>
-                <a:ea typeface="Times New Roman" pitchFamily="34" charset="-122"/>
-                <a:cs typeface="Times New Roman" pitchFamily="34" charset="-120"/>
-              </a:rPr>
-              <a:t>Good organization improves program efficiency.</a:t>
-            </a:r>
-            <a:endParaRPr lang="en-US" sz="1800" dirty="0"/>
-          </a:p>
-          <a:p>
-            <a:pPr marL="177800" indent="-177800">
-              <a:buSzPct val="100000"/>
-              <a:buChar char="•"/>
-            </a:pPr>
-            <a:r>
-              <a:rPr lang="en-US" sz="1800" dirty="0">
-                <a:solidFill>
-                  <a:srgbClr val="111827"/>
-                </a:solidFill>
-                <a:latin typeface="Times New Roman" pitchFamily="34" charset="0"/>
-                <a:ea typeface="Times New Roman" pitchFamily="34" charset="-122"/>
-                <a:cs typeface="Times New Roman" pitchFamily="34" charset="-120"/>
-              </a:rPr>
-              <a:t>Data can be arranged as fields, records, files and databases.</a:t>
-            </a:r>
-            <a:endParaRPr lang="en-US" sz="1800" dirty="0"/>
-          </a:p>
-          <a:p>
-            <a:pPr marL="177800" indent="-177800">
-              <a:buSzPct val="100000"/>
-              <a:buChar char="•"/>
-            </a:pPr>
-            <a:r>
-              <a:rPr lang="en-US" sz="1800" dirty="0">
-                <a:solidFill>
-                  <a:srgbClr val="111827"/>
-                </a:solidFill>
-                <a:latin typeface="Times New Roman" pitchFamily="34" charset="0"/>
-                <a:ea typeface="Times New Roman" pitchFamily="34" charset="-122"/>
-                <a:cs typeface="Times New Roman" pitchFamily="34" charset="-120"/>
-              </a:rPr>
-              <a:t>Common operations include traversal, searching, insertion and deletion.</a:t>
-            </a:r>
-            <a:endParaRPr lang="en-US" sz="1800" dirty="0"/>
-          </a:p>
-          <a:p>
-            <a:pPr marL="177800" indent="-177800">
-              <a:buSzPct val="100000"/>
-              <a:buChar char="•"/>
-            </a:pPr>
-            <a:r>
-              <a:rPr lang="en-US" sz="1800" dirty="0">
-                <a:solidFill>
-                  <a:srgbClr val="111827"/>
-                </a:solidFill>
-                <a:latin typeface="Times New Roman" pitchFamily="34" charset="0"/>
-                <a:ea typeface="Times New Roman" pitchFamily="34" charset="-122"/>
-                <a:cs typeface="Times New Roman" pitchFamily="34" charset="-120"/>
-              </a:rPr>
-              <a:t>Data structures may be primitive/non-primitive, linear/non-linear and static/dynamic.</a:t>
-            </a:r>
-            <a:endParaRPr lang="en-US" sz="1800" dirty="0"/>
-          </a:p>
-        </p:txBody>
-      </p:sp>
-      <p:sp>
-        <p:nvSpPr>
-          <p:cNvPr id="9" name="Text 7"/>
-          <p:cNvSpPr/>
-          <p:nvPr/>
-        </p:nvSpPr>
-        <p:spPr>
-          <a:xfrm>
-            <a:off x="6492240" y="1325880"/>
-            <a:ext cx="3931920" cy="502920"/>
-          </a:xfrm>
-          <a:prstGeom prst="rect">
-            <a:avLst/>
-          </a:prstGeom>
-          <a:solidFill>
-            <a:srgbClr val="FEF3C7"/>
-          </a:solidFill>
-          <a:ln w="12700">
-            <a:solidFill>
-              <a:srgbClr val="FCD34D"/>
-            </a:solidFill>
-          </a:ln>
-        </p:spPr>
-        <p:txBody>
-          <a:bodyPr wrap="square" lIns="1524" tIns="1524" rIns="1524" bIns="1524" rtlCol="0" anchor="ctr">
-            <a:normAutofit/>
-          </a:bodyPr>
-          <a:lstStyle/>
-          <a:p>
-            <a:pPr marL="0" indent="0" algn="ctr">
-              <a:buNone/>
-            </a:pPr>
-            <a:r>
-              <a:rPr lang="en-US" sz="2400" b="1" dirty="0">
-                <a:solidFill>
-                  <a:srgbClr val="F97316"/>
-                </a:solidFill>
-                <a:latin typeface="Times New Roman" pitchFamily="34" charset="0"/>
-                <a:ea typeface="Times New Roman" pitchFamily="34" charset="-122"/>
-                <a:cs typeface="Times New Roman" pitchFamily="34" charset="-120"/>
-              </a:rPr>
-              <a:t>Exit Questions</a:t>
-            </a:r>
-            <a:endParaRPr lang="en-US" sz="2400" dirty="0"/>
-          </a:p>
-        </p:txBody>
-      </p:sp>
-      <p:sp>
-        <p:nvSpPr>
-          <p:cNvPr id="10" name="Text 8"/>
-          <p:cNvSpPr/>
-          <p:nvPr/>
-        </p:nvSpPr>
-        <p:spPr>
-          <a:xfrm>
-            <a:off x="6583680" y="2057400"/>
-            <a:ext cx="4754880" cy="2057400"/>
-          </a:xfrm>
-          <a:prstGeom prst="rect">
-            <a:avLst/>
-          </a:prstGeom>
-          <a:noFill/>
-          <a:ln/>
-        </p:spPr>
-        <p:txBody>
-          <a:bodyPr wrap="square" lIns="1016" tIns="1016" rIns="1016" bIns="1016" rtlCol="0" anchor="t">
-            <a:normAutofit/>
-          </a:bodyPr>
-          <a:lstStyle/>
-          <a:p>
-            <a:pPr marL="177800" indent="-177800">
-              <a:buSzPct val="100000"/>
-              <a:buChar char="•"/>
-            </a:pPr>
-            <a:r>
-              <a:rPr lang="en-US" sz="1900" dirty="0">
-                <a:solidFill>
-                  <a:srgbClr val="111827"/>
-                </a:solidFill>
-                <a:latin typeface="Times New Roman" pitchFamily="34" charset="0"/>
-                <a:ea typeface="Times New Roman" pitchFamily="34" charset="-122"/>
-                <a:cs typeface="Times New Roman" pitchFamily="34" charset="-120"/>
-              </a:rPr>
-              <a:t>Define data structure in your own words.</a:t>
-            </a:r>
-            <a:endParaRPr lang="en-US" sz="1900" dirty="0"/>
-          </a:p>
-          <a:p>
-            <a:pPr marL="177800" indent="-177800">
-              <a:buSzPct val="100000"/>
-              <a:buChar char="•"/>
-            </a:pPr>
-            <a:r>
-              <a:rPr lang="en-US" sz="1900" dirty="0">
-                <a:solidFill>
-                  <a:srgbClr val="111827"/>
-                </a:solidFill>
-                <a:latin typeface="Times New Roman" pitchFamily="34" charset="0"/>
-                <a:ea typeface="Times New Roman" pitchFamily="34" charset="-122"/>
-                <a:cs typeface="Times New Roman" pitchFamily="34" charset="-120"/>
-              </a:rPr>
-              <a:t>Give one example of a linear data structure.</a:t>
-            </a:r>
-            <a:endParaRPr lang="en-US" sz="1900" dirty="0"/>
-          </a:p>
-          <a:p>
-            <a:pPr marL="177800" indent="-177800">
-              <a:buSzPct val="100000"/>
-              <a:buChar char="•"/>
-            </a:pPr>
-            <a:r>
-              <a:rPr lang="en-US" sz="1900" dirty="0">
-                <a:solidFill>
-                  <a:srgbClr val="111827"/>
-                </a:solidFill>
-                <a:latin typeface="Times New Roman" pitchFamily="34" charset="0"/>
-                <a:ea typeface="Times New Roman" pitchFamily="34" charset="-122"/>
-                <a:cs typeface="Times New Roman" pitchFamily="34" charset="-120"/>
-              </a:rPr>
-              <a:t>Why is a graph useful for road networks?</a:t>
-            </a:r>
-            <a:endParaRPr lang="en-US" sz="1900" dirty="0"/>
-          </a:p>
-          <a:p>
-            <a:pPr marL="177800" indent="-177800">
-              <a:buSzPct val="100000"/>
-              <a:buChar char="•"/>
-            </a:pPr>
-            <a:r>
-              <a:rPr lang="en-US" sz="1900" dirty="0">
-                <a:solidFill>
-                  <a:srgbClr val="111827"/>
-                </a:solidFill>
-                <a:latin typeface="Times New Roman" pitchFamily="34" charset="0"/>
-                <a:ea typeface="Times New Roman" pitchFamily="34" charset="-122"/>
-                <a:cs typeface="Times New Roman" pitchFamily="34" charset="-120"/>
-              </a:rPr>
-              <a:t>What is the difference between field and record?</a:t>
-            </a:r>
-            <a:endParaRPr lang="en-US" sz="1900" dirty="0"/>
-          </a:p>
-        </p:txBody>
-      </p:sp>
-      <p:sp>
-        <p:nvSpPr>
-          <p:cNvPr id="11" name="Text 9"/>
-          <p:cNvSpPr/>
-          <p:nvPr/>
-        </p:nvSpPr>
-        <p:spPr>
-          <a:xfrm>
-            <a:off x="1280160" y="5577840"/>
-            <a:ext cx="9646920" cy="548640"/>
-          </a:xfrm>
-          <a:prstGeom prst="rect">
-            <a:avLst/>
-          </a:prstGeom>
-          <a:solidFill>
-            <a:srgbClr val="ECFDF5"/>
-          </a:solidFill>
-          <a:ln w="12700">
-            <a:solidFill>
-              <a:srgbClr val="86EFAC"/>
-            </a:solidFill>
-          </a:ln>
-        </p:spPr>
-        <p:txBody>
-          <a:bodyPr wrap="square" lIns="1524" tIns="1524" rIns="1524" bIns="1524" rtlCol="0" anchor="ctr">
-            <a:normAutofit/>
-          </a:bodyPr>
-          <a:lstStyle/>
-          <a:p>
-            <a:pPr marL="0" indent="0" algn="ctr">
-              <a:buNone/>
-            </a:pPr>
-            <a:r>
-              <a:rPr lang="en-US" sz="1900" b="1" dirty="0">
-                <a:solidFill>
-                  <a:srgbClr val="15803D"/>
-                </a:solidFill>
-                <a:latin typeface="Times New Roman" pitchFamily="34" charset="0"/>
-                <a:ea typeface="Times New Roman" pitchFamily="34" charset="-122"/>
-                <a:cs typeface="Times New Roman" pitchFamily="34" charset="-120"/>
-              </a:rPr>
-              <a:t>Next Lecture: Basic terminology continued, pointers, structures and dynamic memory allocation in C.</a:t>
-            </a:r>
-            <a:endParaRPr lang="en-US" sz="1900" dirty="0"/>
-          </a:p>
-        </p:txBody>
-      </p:sp>
-      <p:sp>
-        <p:nvSpPr>
-          <p:cNvPr id="12" name="Shape 10"/>
-          <p:cNvSpPr/>
-          <p:nvPr/>
-        </p:nvSpPr>
-        <p:spPr>
-          <a:xfrm>
-            <a:off x="502920" y="6419088"/>
-            <a:ext cx="11201400" cy="0"/>
-          </a:xfrm>
-          <a:prstGeom prst="line">
-            <a:avLst/>
-          </a:prstGeom>
-          <a:noFill/>
-          <a:ln w="12700">
-            <a:solidFill>
-              <a:srgbClr val="D6DEE9"/>
-            </a:solidFill>
-            <a:prstDash val="solid"/>
-          </a:ln>
-        </p:spPr>
-        <p:txBody>
-          <a:bodyPr/>
-          <a:lstStyle/>
-          <a:p>
-            <a:endParaRPr lang="en-IN"/>
-          </a:p>
-        </p:txBody>
-      </p:sp>
-      <p:sp>
-        <p:nvSpPr>
-          <p:cNvPr id="13" name="Text 11"/>
-          <p:cNvSpPr/>
-          <p:nvPr/>
-        </p:nvSpPr>
-        <p:spPr>
-          <a:xfrm>
-            <a:off x="548640" y="6483096"/>
-            <a:ext cx="11064240" cy="228600"/>
-          </a:xfrm>
-          <a:prstGeom prst="rect">
-            <a:avLst/>
-          </a:prstGeom>
-          <a:noFill/>
-          <a:ln/>
-        </p:spPr>
-        <p:txBody>
-          <a:bodyPr wrap="square" lIns="254" tIns="254" rIns="254" bIns="254" rtlCol="0" anchor="ctr"/>
-          <a:lstStyle/>
-          <a:p>
-            <a:pPr marL="0" indent="0">
-              <a:buNone/>
-            </a:pPr>
-            <a:r>
-              <a:rPr lang="en-US" sz="1200" i="1" dirty="0">
-                <a:solidFill>
-                  <a:srgbClr val="475569"/>
-                </a:solidFill>
-                <a:latin typeface="Times New Roman" pitchFamily="34" charset="0"/>
-                <a:ea typeface="Times New Roman" pitchFamily="34" charset="-122"/>
-                <a:cs typeface="Times New Roman" pitchFamily="34" charset="-120"/>
-              </a:rPr>
-              <a:t>Teaching cue: Ask students to write answers to exit questions in 5 minutes.</a:t>
-            </a:r>
-            <a:endParaRPr lang="en-US" sz="1200" dirty="0"/>
           </a:p>
         </p:txBody>
       </p:sp>
@@ -7285,8 +5581,8 @@
         </p:nvSpPr>
         <p:spPr>
           <a:xfrm>
-            <a:off x="594360" y="1325880"/>
-            <a:ext cx="11018520" cy="777240"/>
+            <a:off x="457200" y="1325880"/>
+            <a:ext cx="11155680" cy="777240"/>
           </a:xfrm>
           <a:prstGeom prst="rect">
             <a:avLst/>
@@ -7318,7 +5614,7 @@
                 <a:ea typeface="Times New Roman" pitchFamily="34" charset="-122"/>
                 <a:cs typeface="Times New Roman" pitchFamily="34" charset="-120"/>
               </a:rPr>
-              <a:t>A program is not only a set of instructions. It also needs a smart way to store, access and update data.</a:t>
+              <a:t>A program is not only a set of instructions. It also needs a smart way to store, access and   update data.</a:t>
             </a:r>
             <a:endParaRPr lang="en-US" sz="2200" dirty="0"/>
           </a:p>
@@ -7731,45 +6027,6 @@
           <a:lstStyle/>
           <a:p>
             <a:endParaRPr lang="en-IN"/>
-          </a:p>
-        </p:txBody>
-      </p:sp>
-      <p:sp>
-        <p:nvSpPr>
-          <p:cNvPr id="16" name="Text 14"/>
-          <p:cNvSpPr/>
-          <p:nvPr/>
-        </p:nvSpPr>
-        <p:spPr>
-          <a:xfrm>
-            <a:off x="548640" y="6483096"/>
-            <a:ext cx="11064240" cy="228600"/>
-          </a:xfrm>
-          <a:prstGeom prst="rect">
-            <a:avLst/>
-          </a:prstGeom>
-          <a:noFill/>
-          <a:ln/>
-        </p:spPr>
-        <p:txBody>
-          <a:bodyPr wrap="square" lIns="254" tIns="254" rIns="254" bIns="254" rtlCol="0" anchor="ctr"/>
-          <a:lstStyle/>
-          <a:p>
-            <a:pPr marL="0" indent="0">
-              <a:buNone/>
-            </a:pPr>
-            <a:r>
-              <a:rPr lang="en-US" sz="1200" i="1" dirty="0">
-                <a:solidFill>
-                  <a:srgbClr val="475569"/>
-                </a:solidFill>
-                <a:latin typeface="Times New Roman" pitchFamily="34" charset="0"/>
-                <a:ea typeface="Times New Roman" pitchFamily="34" charset="-122"/>
-                <a:cs typeface="Times New Roman" pitchFamily="34" charset="-120"/>
-              </a:rPr>
-              <a:t>Teaching cue: Ask: Which app on your phone uses the largest amount of data?</a:t>
-            </a:r>
-            <a:endParaRPr lang="en-US" sz="1200" dirty="0"/>
           </a:p>
         </p:txBody>
       </p:sp>
@@ -9141,45 +7398,6 @@
           </a:p>
         </p:txBody>
       </p:sp>
-      <p:sp>
-        <p:nvSpPr>
-          <p:cNvPr id="17" name="Text 15"/>
-          <p:cNvSpPr/>
-          <p:nvPr/>
-        </p:nvSpPr>
-        <p:spPr>
-          <a:xfrm>
-            <a:off x="548640" y="6483096"/>
-            <a:ext cx="11064240" cy="228600"/>
-          </a:xfrm>
-          <a:prstGeom prst="rect">
-            <a:avLst/>
-          </a:prstGeom>
-          <a:noFill/>
-          <a:ln/>
-        </p:spPr>
-        <p:txBody>
-          <a:bodyPr wrap="square" lIns="254" tIns="254" rIns="254" bIns="254" rtlCol="0" anchor="ctr"/>
-          <a:lstStyle/>
-          <a:p>
-            <a:pPr marL="0" indent="0">
-              <a:buNone/>
-            </a:pPr>
-            <a:r>
-              <a:rPr lang="en-US" sz="1200" i="1" dirty="0">
-                <a:solidFill>
-                  <a:srgbClr val="475569"/>
-                </a:solidFill>
-                <a:latin typeface="Times New Roman" pitchFamily="34" charset="0"/>
-                <a:ea typeface="Times New Roman" pitchFamily="34" charset="-122"/>
-                <a:cs typeface="Times New Roman" pitchFamily="34" charset="-120"/>
-              </a:rPr>
-              <a:t>Teaching cue: Give one example from attendance, library books, or exam marks.</a:t>
-            </a:r>
-            <a:endParaRPr lang="en-US" sz="1200" dirty="0"/>
-          </a:p>
-        </p:txBody>
-      </p:sp>
     </p:spTree>
   </p:cSld>
   <p:clrMapOvr>
@@ -9717,45 +7935,6 @@
           </a:p>
         </p:txBody>
       </p:sp>
-      <p:sp>
-        <p:nvSpPr>
-          <p:cNvPr id="13" name="Text 11"/>
-          <p:cNvSpPr/>
-          <p:nvPr/>
-        </p:nvSpPr>
-        <p:spPr>
-          <a:xfrm>
-            <a:off x="548640" y="6483096"/>
-            <a:ext cx="11064240" cy="228600"/>
-          </a:xfrm>
-          <a:prstGeom prst="rect">
-            <a:avLst/>
-          </a:prstGeom>
-          <a:noFill/>
-          <a:ln/>
-        </p:spPr>
-        <p:txBody>
-          <a:bodyPr wrap="square" lIns="254" tIns="254" rIns="254" bIns="254" rtlCol="0" anchor="ctr"/>
-          <a:lstStyle/>
-          <a:p>
-            <a:pPr marL="0" indent="0">
-              <a:buNone/>
-            </a:pPr>
-            <a:r>
-              <a:rPr lang="en-US" sz="1200" i="1" dirty="0">
-                <a:solidFill>
-                  <a:srgbClr val="475569"/>
-                </a:solidFill>
-                <a:latin typeface="Times New Roman" pitchFamily="34" charset="0"/>
-                <a:ea typeface="Times New Roman" pitchFamily="34" charset="-122"/>
-                <a:cs typeface="Times New Roman" pitchFamily="34" charset="-120"/>
-              </a:rPr>
-              <a:t>Teaching cue: Write the definition on board and ask students to underline “organizing data in memory”.</a:t>
-            </a:r>
-            <a:endParaRPr lang="en-US" sz="1200" dirty="0"/>
-          </a:p>
-        </p:txBody>
-      </p:sp>
     </p:spTree>
   </p:cSld>
   <p:clrMapOvr>
@@ -10593,45 +8772,6 @@
           </a:p>
         </p:txBody>
       </p:sp>
-      <p:sp>
-        <p:nvSpPr>
-          <p:cNvPr id="20" name="Text 18"/>
-          <p:cNvSpPr/>
-          <p:nvPr/>
-        </p:nvSpPr>
-        <p:spPr>
-          <a:xfrm>
-            <a:off x="548640" y="6483096"/>
-            <a:ext cx="11064240" cy="228600"/>
-          </a:xfrm>
-          <a:prstGeom prst="rect">
-            <a:avLst/>
-          </a:prstGeom>
-          <a:noFill/>
-          <a:ln/>
-        </p:spPr>
-        <p:txBody>
-          <a:bodyPr wrap="square" lIns="254" tIns="254" rIns="254" bIns="254" rtlCol="0" anchor="ctr"/>
-          <a:lstStyle/>
-          <a:p>
-            <a:pPr marL="0" indent="0">
-              <a:buNone/>
-            </a:pPr>
-            <a:r>
-              <a:rPr lang="en-US" sz="1200" i="1" dirty="0">
-                <a:solidFill>
-                  <a:srgbClr val="475569"/>
-                </a:solidFill>
-                <a:latin typeface="Times New Roman" pitchFamily="34" charset="0"/>
-                <a:ea typeface="Times New Roman" pitchFamily="34" charset="-122"/>
-                <a:cs typeface="Times New Roman" pitchFamily="34" charset="-120"/>
-              </a:rPr>
-              <a:t>Teaching cue: Ask students to identify field and record from their ID card.</a:t>
-            </a:r>
-            <a:endParaRPr lang="en-US" sz="1200" dirty="0"/>
-          </a:p>
-        </p:txBody>
-      </p:sp>
     </p:spTree>
   </p:cSld>
   <p:clrMapOvr>
@@ -11096,45 +9236,6 @@
           </a:p>
         </p:txBody>
       </p:sp>
-      <p:sp>
-        <p:nvSpPr>
-          <p:cNvPr id="12" name="Text 9"/>
-          <p:cNvSpPr/>
-          <p:nvPr/>
-        </p:nvSpPr>
-        <p:spPr>
-          <a:xfrm>
-            <a:off x="548640" y="6483096"/>
-            <a:ext cx="11064240" cy="228600"/>
-          </a:xfrm>
-          <a:prstGeom prst="rect">
-            <a:avLst/>
-          </a:prstGeom>
-          <a:noFill/>
-          <a:ln/>
-        </p:spPr>
-        <p:txBody>
-          <a:bodyPr wrap="square" lIns="254" tIns="254" rIns="254" bIns="254" rtlCol="0" anchor="ctr"/>
-          <a:lstStyle/>
-          <a:p>
-            <a:pPr marL="0" indent="0">
-              <a:buNone/>
-            </a:pPr>
-            <a:r>
-              <a:rPr lang="en-US" sz="1200" i="1" dirty="0">
-                <a:solidFill>
-                  <a:srgbClr val="475569"/>
-                </a:solidFill>
-                <a:latin typeface="Times New Roman" pitchFamily="34" charset="0"/>
-                <a:ea typeface="Times New Roman" pitchFamily="34" charset="-122"/>
-                <a:cs typeface="Times New Roman" pitchFamily="34" charset="-120"/>
-              </a:rPr>
-              <a:t>Teaching cue: Explain memory using boxes, not abstract theory.</a:t>
-            </a:r>
-            <a:endParaRPr lang="en-US" sz="1200" dirty="0"/>
-          </a:p>
-        </p:txBody>
-      </p:sp>
     </p:spTree>
   </p:cSld>
   <p:clrMapOvr>
@@ -11864,45 +9965,6 @@
           </a:p>
         </p:txBody>
       </p:sp>
-      <p:sp>
-        <p:nvSpPr>
-          <p:cNvPr id="16" name="Text 14"/>
-          <p:cNvSpPr/>
-          <p:nvPr/>
-        </p:nvSpPr>
-        <p:spPr>
-          <a:xfrm>
-            <a:off x="548640" y="6483096"/>
-            <a:ext cx="11064240" cy="228600"/>
-          </a:xfrm>
-          <a:prstGeom prst="rect">
-            <a:avLst/>
-          </a:prstGeom>
-          <a:noFill/>
-          <a:ln/>
-        </p:spPr>
-        <p:txBody>
-          <a:bodyPr wrap="square" lIns="254" tIns="254" rIns="254" bIns="254" rtlCol="0" anchor="ctr"/>
-          <a:lstStyle/>
-          <a:p>
-            <a:pPr marL="0" indent="0">
-              <a:buNone/>
-            </a:pPr>
-            <a:r>
-              <a:rPr lang="en-US" sz="1200" i="1" dirty="0">
-                <a:solidFill>
-                  <a:srgbClr val="475569"/>
-                </a:solidFill>
-                <a:latin typeface="Times New Roman" pitchFamily="34" charset="0"/>
-                <a:ea typeface="Times New Roman" pitchFamily="34" charset="-122"/>
-                <a:cs typeface="Times New Roman" pitchFamily="34" charset="-120"/>
-              </a:rPr>
-              <a:t>Teaching cue: Ask: Which operation happens when we delete a WhatsApp chat?</a:t>
-            </a:r>
-            <a:endParaRPr lang="en-US" sz="1200" dirty="0"/>
-          </a:p>
-        </p:txBody>
-      </p:sp>
     </p:spTree>
   </p:cSld>
   <p:clrMapOvr>
@@ -12527,45 +10589,6 @@
           <a:lstStyle/>
           <a:p>
             <a:endParaRPr lang="en-IN"/>
-          </a:p>
-        </p:txBody>
-      </p:sp>
-      <p:sp>
-        <p:nvSpPr>
-          <p:cNvPr id="16" name="Text 14"/>
-          <p:cNvSpPr/>
-          <p:nvPr/>
-        </p:nvSpPr>
-        <p:spPr>
-          <a:xfrm>
-            <a:off x="548640" y="6483096"/>
-            <a:ext cx="11064240" cy="228600"/>
-          </a:xfrm>
-          <a:prstGeom prst="rect">
-            <a:avLst/>
-          </a:prstGeom>
-          <a:noFill/>
-          <a:ln/>
-        </p:spPr>
-        <p:txBody>
-          <a:bodyPr wrap="square" lIns="254" tIns="254" rIns="254" bIns="254" rtlCol="0" anchor="ctr"/>
-          <a:lstStyle/>
-          <a:p>
-            <a:pPr marL="0" indent="0">
-              <a:buNone/>
-            </a:pPr>
-            <a:r>
-              <a:rPr lang="en-US" sz="1200" i="1" dirty="0">
-                <a:solidFill>
-                  <a:srgbClr val="475569"/>
-                </a:solidFill>
-                <a:latin typeface="Times New Roman" pitchFamily="34" charset="0"/>
-                <a:ea typeface="Times New Roman" pitchFamily="34" charset="-122"/>
-                <a:cs typeface="Times New Roman" pitchFamily="34" charset="-120"/>
-              </a:rPr>
-              <a:t>Teaching cue: Clarify that int is data type, but array/list/tree are data structures.</a:t>
-            </a:r>
-            <a:endParaRPr lang="en-US" sz="1200" dirty="0"/>
           </a:p>
         </p:txBody>
       </p:sp>
